--- a/docs/generated/execution-control-flow/执行按钮逻辑流程图.pptx
+++ b/docs/generated/execution-control-flow/执行按钮逻辑流程图.pptx
@@ -1100,7 +1100,7 @@
                 <a:latin typeface="MiSans"/>
                 <a:ea typeface="MiSans"/>
               </a:rPr>
-              <a:t>断点 = { 工位, 工步 }，随执行进度不断刷新；自动与单步共用同一份断点。无论从哪一侧、哪种模式再次执行，都从断点开始。</a:t>
+              <a:t>断点 = { 工位, 工步 }..，随执行进度不断刷新；自动与单步共用同一份断点。无论从哪一侧、哪种模式再次执行，都从断点开始。</a:t>
             </a:r>
             <a:endParaRPr lang="en-US" sz="1300" noProof="1"/>
           </a:p>

--- a/docs/generated/execution-control-flow/执行按钮逻辑流程图.pptx
+++ b/docs/generated/execution-control-flow/执行按钮逻辑流程图.pptx
@@ -345,7 +345,7 @@
                 <a:latin typeface="MiSans"/>
                 <a:ea typeface="MiSans"/>
               </a:rPr>
-              <a:t>断点续跑 · 两区域互锁 · 单步弹窗交互 —— 执行按钮逻辑设计（v2 定稿）</a:t>
+              <a:t>执行/暂停两态 · 异常标记 · 跳选前序校验 —— 执行按钮逻辑设计（v3 定稿）</a:t>
             </a:r>
             <a:endParaRPr lang="en-US" sz="1600" noProof="1"/>
           </a:p>
@@ -687,7 +687,7 @@
                 <a:latin typeface="MiSans"/>
                 <a:ea typeface="MiSans"/>
               </a:rPr>
-              <a:t>已停止</a:t>
+              <a:t>异常</a:t>
             </a:r>
             <a:endParaRPr lang="en-US" sz="1100" noProof="1"/>
           </a:p>
@@ -804,7 +804,7 @@
                 <a:latin typeface="MiSans"/>
                 <a:ea typeface="MiSans"/>
               </a:rPr>
-              <a:t>断点模型：每个工单记住「下一次从哪里执行」</a:t>
+              <a:t>执行进度模型：每个工单记住「下一次从哪里执行」</a:t>
             </a:r>
             <a:endParaRPr lang="en-US" sz="2400" noProof="1"/>
           </a:p>
@@ -1058,7 +1058,7 @@
                 <a:latin typeface="MiSans"/>
                 <a:ea typeface="MiSans"/>
               </a:rPr>
-              <a:t>断点续跑（核心规则）</a:t>
+              <a:t>进度续跑（核心规则）</a:t>
             </a:r>
             <a:endParaRPr lang="en-US" sz="1500" noProof="1"/>
           </a:p>
@@ -1100,7 +1100,7 @@
                 <a:latin typeface="MiSans"/>
                 <a:ea typeface="MiSans"/>
               </a:rPr>
-              <a:t>断点 = { 工位, 工步 }..，随执行进度不断刷新；自动与单步共用同一份断点。无论从哪一侧、哪种模式再次执行，都从断点开始。</a:t>
+              <a:t>执行进度 = { 工位, 工步 }，随执行完成不断刷新；自动与单步共用同一份进度。无论哪种模式执行完一工步，进度都落到下一工步。</a:t>
             </a:r>
             <a:endParaRPr lang="en-US" sz="1300" noProof="1"/>
           </a:p>
@@ -1206,7 +1206,7 @@
                 <a:latin typeface="MiSans"/>
                 <a:ea typeface="MiSans"/>
               </a:rPr>
-              <a:t>初始化 = 重置断点（不是执行的前置）</a:t>
+              <a:t>初始化 = 全部重置（不是执行的前置）</a:t>
             </a:r>
             <a:endParaRPr lang="en-US" sz="1500" noProof="1"/>
           </a:p>
@@ -1248,7 +1248,7 @@
                 <a:latin typeface="MiSans"/>
                 <a:ea typeface="MiSans"/>
               </a:rPr>
-              <a:t>整线初始化清零整条断点，单站初始化清零该工位断点，之后执行从最初开始。新建工单选中后直接点「执行」即可，无需先初始化。</a:t>
+              <a:t>整线初始化清零整线设备状态与软件流程，单站初始化清零该工位设备与流程，之后执行从最初开始。新建工单选中后直接点「执行」即可，无需先初始化。</a:t>
             </a:r>
             <a:endParaRPr lang="en-US" sz="1300" noProof="1"/>
           </a:p>
@@ -1312,7 +1312,7 @@
                 <a:latin typeface="MiSans"/>
                 <a:ea typeface="MiSans"/>
               </a:rPr>
-              <a:t>四种执行状态</a:t>
+              <a:t>四种任务状态</a:t>
             </a:r>
             <a:endParaRPr lang="en-US" sz="1400" noProof="1"/>
           </a:p>
@@ -1630,7 +1630,7 @@
                 <a:latin typeface="MiSans"/>
                 <a:ea typeface="MiSans"/>
               </a:rPr>
-              <a:t>会话保留、记住工步内进度；仍视为运行中，初始化禁点，仅「继续 / 停止」可点。</a:t>
+              <a:t>软暂停：系统把当前工步执行完后停住；仍视为运行中，初始化禁点，仅「执行（恢复）」可点。</a:t>
             </a:r>
             <a:endParaRPr lang="en-US" sz="1200" noProof="1"/>
           </a:p>
@@ -1694,7 +1694,7 @@
                 <a:latin typeface="MiSans"/>
                 <a:ea typeface="MiSans"/>
               </a:rPr>
-              <a:t>已停止（stopped，含异常停止）</a:t>
+              <a:t>存在异常工步（abnormal）</a:t>
             </a:r>
             <a:endParaRPr lang="en-US" sz="1300" noProof="1"/>
           </a:p>
@@ -1736,7 +1736,7 @@
                 <a:latin typeface="MiSans"/>
                 <a:ea typeface="MiSans"/>
               </a:rPr>
-              <a:t>会话释放；断点保留，当前工步标记「执行错误」；执行按钮直接恢复可点，无需初始化。</a:t>
+              <a:t>会话释放；当前工步标记「异常」，已做部分作废；可再次执行从该工步重做，或选中该步单步执行，均无需初始化。</a:t>
             </a:r>
             <a:endParaRPr lang="en-US" sz="1200" noProof="1"/>
           </a:p>
@@ -1778,7 +1778,7 @@
                 <a:latin typeface="MiSans"/>
                 <a:ea typeface="MiSans"/>
               </a:rPr>
-              <a:t>北煤机拼装产线原型 · 执行控制逻辑 v2 · 02 / 06</a:t>
+              <a:t>北煤机拼装产线原型 · 执行控制逻辑 v3 · 02 / 06</a:t>
             </a:r>
             <a:endParaRPr lang="en-US" sz="1100" noProof="1"/>
           </a:p>
@@ -2109,7 +2109,7 @@
                 <a:latin typeface="MiSans"/>
                 <a:ea typeface="MiSans"/>
               </a:rPr>
-              <a:t>已停止（stopped）</a:t>
+              <a:t>异常（abnormal）</a:t>
             </a:r>
             <a:endParaRPr lang="en-US" sz="1400" noProof="1"/>
           </a:p>
@@ -2127,7 +2127,7 @@
                 <a:latin typeface="MiSans"/>
                 <a:ea typeface="MiSans"/>
               </a:rPr>
-              <a:t>断点保留 · 工步标记错误</a:t>
+              <a:t>当前工步标记异常 · 会话释放</a:t>
             </a:r>
             <a:endParaRPr lang="en-US" sz="1400" noProof="1"/>
           </a:p>
@@ -2211,7 +2211,7 @@
                 <a:latin typeface="MiSans"/>
                 <a:ea typeface="MiSans"/>
               </a:rPr>
-              <a:t>记住工步内进度</a:t>
+              <a:t>当前工步执行完后停住</a:t>
             </a:r>
             <a:endParaRPr lang="en-US" sz="1400" noProof="1"/>
           </a:p>
@@ -2380,7 +2380,7 @@
                 <a:latin typeface="MiSans"/>
                 <a:ea typeface="MiSans"/>
               </a:rPr>
-              <a:t>点击「执行 / 自动执行 / 单步确认执行」</a:t>
+              <a:t>点击「执行 / 自动执行 / 单步执行」</a:t>
             </a:r>
             <a:endParaRPr lang="en-US" sz="1000" noProof="1"/>
           </a:p>
@@ -2398,7 +2398,7 @@
                 <a:latin typeface="MiSans"/>
                 <a:ea typeface="MiSans"/>
               </a:rPr>
-              <a:t>起点 = 断点（首次为首工步）</a:t>
+              <a:t>起点 = 当前进度工步（首次为首工步）</a:t>
             </a:r>
             <a:endParaRPr lang="en-US" sz="1000" noProof="1"/>
           </a:p>
@@ -2501,7 +2501,7 @@
                 <a:latin typeface="MiSans"/>
                 <a:ea typeface="MiSans"/>
               </a:rPr>
-              <a:t>记住工步内进度</a:t>
+              <a:t>执行完当前工步后停住</a:t>
             </a:r>
             <a:endParaRPr lang="en-US" sz="1000" noProof="1"/>
           </a:p>
@@ -2586,7 +2586,7 @@
                 <a:latin typeface="MiSans"/>
                 <a:ea typeface="MiSans"/>
               </a:rPr>
-              <a:t>继续</a:t>
+              <a:t>执行（恢复）</a:t>
             </a:r>
             <a:endParaRPr lang="en-US" sz="1000" noProof="1"/>
           </a:p>
@@ -2604,7 +2604,7 @@
                 <a:latin typeface="MiSans"/>
                 <a:ea typeface="MiSans"/>
               </a:rPr>
-              <a:t>执行完当前工步再推进</a:t>
+              <a:t>从下一工步继续推进</a:t>
             </a:r>
             <a:endParaRPr lang="en-US" sz="1000" noProof="1"/>
           </a:p>
@@ -2689,7 +2689,7 @@
                 <a:latin typeface="MiSans"/>
                 <a:ea typeface="MiSans"/>
               </a:rPr>
-              <a:t>停止（确认弹窗）/ 视觉异常确认</a:t>
+              <a:t>报错 / 人工急停（异常弹窗确认）</a:t>
             </a:r>
             <a:endParaRPr lang="en-US" sz="1000" noProof="1"/>
           </a:p>
@@ -2707,7 +2707,7 @@
                 <a:latin typeface="MiSans"/>
                 <a:ea typeface="MiSans"/>
               </a:rPr>
-              <a:t>断点保留 · 工步标记执行错误</a:t>
+              <a:t>当前工步标记异常 · 会话释放</a:t>
             </a:r>
             <a:endParaRPr lang="en-US" sz="1000" noProof="1"/>
           </a:p>
@@ -2792,7 +2792,7 @@
                 <a:latin typeface="MiSans"/>
                 <a:ea typeface="MiSans"/>
               </a:rPr>
-              <a:t>停止：与上方等效</a:t>
+              <a:t>异常处理：两侧等效</a:t>
             </a:r>
             <a:endParaRPr lang="en-US" sz="1000" noProof="1"/>
           </a:p>
@@ -2877,7 +2877,7 @@
                 <a:latin typeface="MiSans"/>
                 <a:ea typeface="MiSans"/>
               </a:rPr>
-              <a:t>再次执行：从断点工步重做</a:t>
+              <a:t>再次执行：从异常工步重做</a:t>
             </a:r>
             <a:endParaRPr lang="en-US" sz="1000" noProof="1"/>
           </a:p>
@@ -2972,7 +2972,7 @@
                 <a:latin typeface="MiSans"/>
                 <a:ea typeface="MiSans"/>
               </a:rPr>
-              <a:t>初始化：断点清零，执行从最初开始（running / paused 下禁点）</a:t>
+              <a:t>初始化：状态全部清零，执行从最初开始（running / paused 下禁点）</a:t>
             </a:r>
             <a:endParaRPr lang="en-US" sz="1100" noProof="1"/>
           </a:p>
@@ -3099,7 +3099,7 @@
                 <a:latin typeface="MiSans"/>
                 <a:ea typeface="MiSans"/>
               </a:rPr>
-              <a:t>互锁摘要：运行中 → 初始化禁点、非本会话执行按钮禁点（停止除外）；暂停仍视为运行中，初始化同样禁点；停止 / 异常停止后执行按钮直接恢复可点，无需初始化即可续跑。</a:t>
+              <a:t>互锁摘要：运行中 → 初始化禁点、非本会话执行按钮禁点；暂停仍视为运行中，初始化同样禁点；异常确认后当前工步标记异常、会话释放，可直接再次执行重做，无需初始化。</a:t>
             </a:r>
             <a:endParaRPr lang="en-US" sz="1200" noProof="1"/>
           </a:p>
@@ -3141,7 +3141,7 @@
                 <a:latin typeface="MiSans"/>
                 <a:ea typeface="MiSans"/>
               </a:rPr>
-              <a:t>北煤机拼装产线原型 · 执行控制逻辑 v2 · 03 / 06</a:t>
+              <a:t>北煤机拼装产线原型 · 执行控制逻辑 v3 · 03 / 06</a:t>
             </a:r>
             <a:endParaRPr lang="en-US" sz="1100" noProof="1"/>
           </a:p>
@@ -3795,7 +3795,7 @@
                           <a:latin typeface="Times New Roman"/>
                           <a:ea typeface="Times New Roman"/>
                         </a:rPr>
-                        <a:t>✓</a:t>
+                        <a:t>✓ 暂停　其余✗</a:t>
                       </a:r>
                       <a:r>
                         <a:rPr lang="en-US" sz="1150" noProof="1">
@@ -3805,7 +3805,7 @@
                           <a:latin typeface="Times New Roman"/>
                           <a:ea typeface="Times New Roman"/>
                         </a:rPr>
-                        <a:t> 暂停　</a:t>
+                        <a:t/>
                       </a:r>
                       <a:r>
                         <a:rPr lang="en-US" sz="1150" noProof="1">
@@ -3815,7 +3815,7 @@
                           <a:latin typeface="Times New Roman"/>
                           <a:ea typeface="Times New Roman"/>
                         </a:rPr>
-                        <a:t>✓</a:t>
+                        <a:t/>
                       </a:r>
                       <a:r>
                         <a:rPr lang="en-US" sz="1150" noProof="1">
@@ -3825,7 +3825,7 @@
                           <a:latin typeface="Times New Roman"/>
                           <a:ea typeface="Times New Roman"/>
                         </a:rPr>
-                        <a:t> 停止　其余</a:t>
+                        <a:t/>
                       </a:r>
                       <a:r>
                         <a:rPr lang="en-US" sz="1150" noProof="1">
@@ -3835,7 +3835,7 @@
                           <a:latin typeface="Times New Roman"/>
                           <a:ea typeface="Times New Roman"/>
                         </a:rPr>
-                        <a:t>✗</a:t>
+                        <a:t/>
                       </a:r>
                     </a:p>
                   </a:txBody>
@@ -3877,7 +3877,7 @@
                           <a:latin typeface="Times New Roman"/>
                           <a:ea typeface="Times New Roman"/>
                         </a:rPr>
-                        <a:t>全部置灰（</a:t>
+                        <a:t>全部置灰</a:t>
                       </a:r>
                       <a:r>
                         <a:rPr lang="en-US" sz="1150" noProof="1">
@@ -3887,7 +3887,7 @@
                           <a:latin typeface="Times New Roman"/>
                           <a:ea typeface="Times New Roman"/>
                         </a:rPr>
-                        <a:t>✓</a:t>
+                        <a:t/>
                       </a:r>
                       <a:r>
                         <a:rPr lang="en-US" sz="1150" noProof="1">
@@ -3897,7 +3897,7 @@
                           <a:latin typeface="Times New Roman"/>
                           <a:ea typeface="Times New Roman"/>
                         </a:rPr>
-                        <a:t> 停止执行）</a:t>
+                        <a:t/>
                       </a:r>
                     </a:p>
                   </a:txBody>
@@ -3939,7 +3939,7 @@
                           <a:latin typeface="Times New Roman"/>
                           <a:ea typeface="Times New Roman"/>
                         </a:rPr>
-                        <a:t>置灰，不允许进入单步（</a:t>
+                        <a:t>置灰，不允许进入单步</a:t>
                       </a:r>
                       <a:r>
                         <a:rPr lang="en-US" sz="1150" noProof="1">
@@ -3949,7 +3949,7 @@
                           <a:latin typeface="Times New Roman"/>
                           <a:ea typeface="Times New Roman"/>
                         </a:rPr>
-                        <a:t>✓</a:t>
+                        <a:t/>
                       </a:r>
                       <a:r>
                         <a:rPr lang="en-US" sz="1150" noProof="1">
@@ -3959,7 +3959,7 @@
                           <a:latin typeface="Times New Roman"/>
                           <a:ea typeface="Times New Roman"/>
                         </a:rPr>
-                        <a:t> 停止执行）</a:t>
+                        <a:t/>
                       </a:r>
                     </a:p>
                   </a:txBody>
@@ -4050,7 +4050,7 @@
                           <a:latin typeface="Times New Roman"/>
                           <a:ea typeface="Times New Roman"/>
                         </a:rPr>
-                        <a:t>置灰（</a:t>
+                        <a:t>全部置灰</a:t>
                       </a:r>
                       <a:r>
                         <a:rPr lang="en-US" sz="1150" noProof="1">
@@ -4060,7 +4060,7 @@
                           <a:latin typeface="Times New Roman"/>
                           <a:ea typeface="Times New Roman"/>
                         </a:rPr>
-                        <a:t>✓</a:t>
+                        <a:t/>
                       </a:r>
                       <a:r>
                         <a:rPr lang="en-US" sz="1150" noProof="1">
@@ -4070,7 +4070,7 @@
                           <a:latin typeface="Times New Roman"/>
                           <a:ea typeface="Times New Roman"/>
                         </a:rPr>
-                        <a:t> 停止）</a:t>
+                        <a:t/>
                       </a:r>
                     </a:p>
                   </a:txBody>
@@ -4112,7 +4112,7 @@
                           <a:latin typeface="Times New Roman"/>
                           <a:ea typeface="Times New Roman"/>
                         </a:rPr>
-                        <a:t>✓</a:t>
+                        <a:t>✓ 暂停　初始化✗</a:t>
                       </a:r>
                       <a:r>
                         <a:rPr lang="en-US" sz="1150" noProof="1">
@@ -4122,7 +4122,7 @@
                           <a:latin typeface="Times New Roman"/>
                           <a:ea typeface="Times New Roman"/>
                         </a:rPr>
-                        <a:t> 暂停　</a:t>
+                        <a:t/>
                       </a:r>
                       <a:r>
                         <a:rPr lang="en-US" sz="1150" noProof="1">
@@ -4132,7 +4132,7 @@
                           <a:latin typeface="Times New Roman"/>
                           <a:ea typeface="Times New Roman"/>
                         </a:rPr>
-                        <a:t>✓</a:t>
+                        <a:t/>
                       </a:r>
                       <a:r>
                         <a:rPr lang="en-US" sz="1150" noProof="1">
@@ -4142,7 +4142,7 @@
                           <a:latin typeface="Times New Roman"/>
                           <a:ea typeface="Times New Roman"/>
                         </a:rPr>
-                        <a:t> 停止　初始化</a:t>
+                        <a:t/>
                       </a:r>
                       <a:r>
                         <a:rPr lang="en-US" sz="1150" noProof="1">
@@ -4152,7 +4152,7 @@
                           <a:latin typeface="Times New Roman"/>
                           <a:ea typeface="Times New Roman"/>
                         </a:rPr>
-                        <a:t>✗</a:t>
+                        <a:t/>
                       </a:r>
                     </a:p>
                   </a:txBody>
@@ -4295,7 +4295,7 @@
                           <a:latin typeface="Times New Roman"/>
                           <a:ea typeface="Times New Roman"/>
                         </a:rPr>
-                        <a:t>置灰（</a:t>
+                        <a:t>全部置灰</a:t>
                       </a:r>
                       <a:r>
                         <a:rPr lang="en-US" sz="1150" noProof="1">
@@ -4305,7 +4305,7 @@
                           <a:latin typeface="Times New Roman"/>
                           <a:ea typeface="Times New Roman"/>
                         </a:rPr>
-                        <a:t>✓</a:t>
+                        <a:t/>
                       </a:r>
                       <a:r>
                         <a:rPr lang="en-US" sz="1150" noProof="1">
@@ -4315,7 +4315,7 @@
                           <a:latin typeface="Times New Roman"/>
                           <a:ea typeface="Times New Roman"/>
                         </a:rPr>
-                        <a:t> 停止）</a:t>
+                        <a:t/>
                       </a:r>
                     </a:p>
                   </a:txBody>
@@ -4409,7 +4409,7 @@
                           <a:latin typeface="Times New Roman"/>
                           <a:ea typeface="Times New Roman"/>
                         </a:rPr>
-                        <a:t>✓</a:t>
+                        <a:t>✓ 暂停　初始化✗</a:t>
                       </a:r>
                       <a:r>
                         <a:rPr lang="en-US" sz="1150" noProof="1">
@@ -4419,7 +4419,7 @@
                           <a:latin typeface="Times New Roman"/>
                           <a:ea typeface="Times New Roman"/>
                         </a:rPr>
-                        <a:t> 暂停　</a:t>
+                        <a:t/>
                       </a:r>
                       <a:r>
                         <a:rPr lang="en-US" sz="1150" noProof="1">
@@ -4429,7 +4429,7 @@
                           <a:latin typeface="Times New Roman"/>
                           <a:ea typeface="Times New Roman"/>
                         </a:rPr>
-                        <a:t>✓</a:t>
+                        <a:t/>
                       </a:r>
                       <a:r>
                         <a:rPr lang="en-US" sz="1150" noProof="1">
@@ -4439,7 +4439,7 @@
                           <a:latin typeface="Times New Roman"/>
                           <a:ea typeface="Times New Roman"/>
                         </a:rPr>
-                        <a:t> 停止　初始化</a:t>
+                        <a:t/>
                       </a:r>
                       <a:r>
                         <a:rPr lang="en-US" sz="1150" noProof="1">
@@ -4449,7 +4449,7 @@
                           <a:latin typeface="Times New Roman"/>
                           <a:ea typeface="Times New Roman"/>
                         </a:rPr>
-                        <a:t>✗</a:t>
+                        <a:t/>
                       </a:r>
                     </a:p>
                   </a:txBody>
@@ -4540,7 +4540,7 @@
                           <a:latin typeface="Times New Roman"/>
                           <a:ea typeface="Times New Roman"/>
                         </a:rPr>
-                        <a:t>✓</a:t>
+                        <a:t>✓ 执行（恢复）　初始化✗</a:t>
                       </a:r>
                       <a:r>
                         <a:rPr lang="en-US" sz="1150" noProof="1">
@@ -4550,7 +4550,7 @@
                           <a:latin typeface="Times New Roman"/>
                           <a:ea typeface="Times New Roman"/>
                         </a:rPr>
-                        <a:t> 继续　</a:t>
+                        <a:t/>
                       </a:r>
                       <a:r>
                         <a:rPr lang="en-US" sz="1150" noProof="1">
@@ -4560,7 +4560,7 @@
                           <a:latin typeface="Times New Roman"/>
                           <a:ea typeface="Times New Roman"/>
                         </a:rPr>
-                        <a:t>✓</a:t>
+                        <a:t/>
                       </a:r>
                       <a:r>
                         <a:rPr lang="en-US" sz="1150" noProof="1">
@@ -4570,7 +4570,7 @@
                           <a:latin typeface="Times New Roman"/>
                           <a:ea typeface="Times New Roman"/>
                         </a:rPr>
-                        <a:t> 停止　初始化</a:t>
+                        <a:t/>
                       </a:r>
                       <a:r>
                         <a:rPr lang="en-US" sz="1150" noProof="1">
@@ -4580,7 +4580,7 @@
                           <a:latin typeface="Times New Roman"/>
                           <a:ea typeface="Times New Roman"/>
                         </a:rPr>
-                        <a:t>✗</a:t>
+                        <a:t/>
                       </a:r>
                     </a:p>
                   </a:txBody>
@@ -4622,7 +4622,7 @@
                           <a:latin typeface="Times New Roman"/>
                           <a:ea typeface="Times New Roman"/>
                         </a:rPr>
-                        <a:t>✓</a:t>
+                        <a:t>✓ 执行（恢复）　初始化✗</a:t>
                       </a:r>
                       <a:r>
                         <a:rPr lang="en-US" sz="1150" noProof="1">
@@ -4632,7 +4632,7 @@
                           <a:latin typeface="Times New Roman"/>
                           <a:ea typeface="Times New Roman"/>
                         </a:rPr>
-                        <a:t> 继续　</a:t>
+                        <a:t/>
                       </a:r>
                       <a:r>
                         <a:rPr lang="en-US" sz="1150" noProof="1">
@@ -4642,7 +4642,7 @@
                           <a:latin typeface="Times New Roman"/>
                           <a:ea typeface="Times New Roman"/>
                         </a:rPr>
-                        <a:t>✓</a:t>
+                        <a:t/>
                       </a:r>
                       <a:r>
                         <a:rPr lang="en-US" sz="1150" noProof="1">
@@ -4652,7 +4652,7 @@
                           <a:latin typeface="Times New Roman"/>
                           <a:ea typeface="Times New Roman"/>
                         </a:rPr>
-                        <a:t> 停止　初始化</a:t>
+                        <a:t/>
                       </a:r>
                       <a:r>
                         <a:rPr lang="en-US" sz="1150" noProof="1">
@@ -4662,7 +4662,7 @@
                           <a:latin typeface="Times New Roman"/>
                           <a:ea typeface="Times New Roman"/>
                         </a:rPr>
-                        <a:t>✗</a:t>
+                        <a:t/>
                       </a:r>
                     </a:p>
                   </a:txBody>
@@ -4704,7 +4704,7 @@
                           <a:latin typeface="Times New Roman"/>
                           <a:ea typeface="Times New Roman"/>
                         </a:rPr>
-                        <a:t>✓</a:t>
+                        <a:t>✓ 执行（恢复）　初始化✗</a:t>
                       </a:r>
                       <a:r>
                         <a:rPr lang="en-US" sz="1150" noProof="1">
@@ -4714,7 +4714,7 @@
                           <a:latin typeface="Times New Roman"/>
                           <a:ea typeface="Times New Roman"/>
                         </a:rPr>
-                        <a:t> 继续　</a:t>
+                        <a:t/>
                       </a:r>
                       <a:r>
                         <a:rPr lang="en-US" sz="1150" noProof="1">
@@ -4724,7 +4724,7 @@
                           <a:latin typeface="Times New Roman"/>
                           <a:ea typeface="Times New Roman"/>
                         </a:rPr>
-                        <a:t>✓</a:t>
+                        <a:t/>
                       </a:r>
                       <a:r>
                         <a:rPr lang="en-US" sz="1150" noProof="1">
@@ -4734,7 +4734,7 @@
                           <a:latin typeface="Times New Roman"/>
                           <a:ea typeface="Times New Roman"/>
                         </a:rPr>
-                        <a:t> 停止　初始化</a:t>
+                        <a:t/>
                       </a:r>
                       <a:r>
                         <a:rPr lang="en-US" sz="1150" noProof="1">
@@ -4744,7 +4744,7 @@
                           <a:latin typeface="Times New Roman"/>
                           <a:ea typeface="Times New Roman"/>
                         </a:rPr>
-                        <a:t>✗</a:t>
+                        <a:t/>
                       </a:r>
                     </a:p>
                   </a:txBody>
@@ -4793,7 +4793,7 @@
                           <a:latin typeface="Times New Roman"/>
                           <a:ea typeface="Times New Roman"/>
                         </a:rPr>
-                        <a:t>已停止（含异常停止）</a:t>
+                        <a:t>存在异常工步</a:t>
                       </a:r>
                     </a:p>
                   </a:txBody>
@@ -4835,7 +4835,7 @@
                           <a:latin typeface="Times New Roman"/>
                           <a:ea typeface="Times New Roman"/>
                         </a:rPr>
-                        <a:t>✓</a:t>
+                        <a:t>✓ 初始化　✓ 执行（从异常工步重做）</a:t>
                       </a:r>
                       <a:r>
                         <a:rPr lang="en-US" sz="1150" noProof="1">
@@ -4845,7 +4845,7 @@
                           <a:latin typeface="Times New Roman"/>
                           <a:ea typeface="Times New Roman"/>
                         </a:rPr>
-                        <a:t> 初始化　</a:t>
+                        <a:t/>
                       </a:r>
                       <a:r>
                         <a:rPr lang="en-US" sz="1150" noProof="1">
@@ -4855,7 +4855,7 @@
                           <a:latin typeface="Times New Roman"/>
                           <a:ea typeface="Times New Roman"/>
                         </a:rPr>
-                        <a:t>✓</a:t>
+                        <a:t/>
                       </a:r>
                       <a:r>
                         <a:rPr lang="en-US" sz="1150" noProof="1">
@@ -4865,7 +4865,7 @@
                           <a:latin typeface="Times New Roman"/>
                           <a:ea typeface="Times New Roman"/>
                         </a:rPr>
-                        <a:t> 执行（断点续跑）</a:t>
+                        <a:t/>
                       </a:r>
                     </a:p>
                   </a:txBody>
@@ -4907,7 +4907,7 @@
                           <a:latin typeface="Times New Roman"/>
                           <a:ea typeface="Times New Roman"/>
                         </a:rPr>
-                        <a:t>✓</a:t>
+                        <a:t>✓ 初始化　✓ 自动执行（从进度工步续跑）</a:t>
                       </a:r>
                       <a:r>
                         <a:rPr lang="en-US" sz="1150" noProof="1">
@@ -4917,7 +4917,7 @@
                           <a:latin typeface="Times New Roman"/>
                           <a:ea typeface="Times New Roman"/>
                         </a:rPr>
-                        <a:t> 初始化　</a:t>
+                        <a:t/>
                       </a:r>
                       <a:r>
                         <a:rPr lang="en-US" sz="1150" noProof="1">
@@ -4927,7 +4927,7 @@
                           <a:latin typeface="Times New Roman"/>
                           <a:ea typeface="Times New Roman"/>
                         </a:rPr>
-                        <a:t>✓</a:t>
+                        <a:t/>
                       </a:r>
                       <a:r>
                         <a:rPr lang="en-US" sz="1150" noProof="1">
@@ -4937,7 +4937,7 @@
                           <a:latin typeface="Times New Roman"/>
                           <a:ea typeface="Times New Roman"/>
                         </a:rPr>
-                        <a:t> 自动执行（断点续跑）</a:t>
+                        <a:t/>
                       </a:r>
                     </a:p>
                   </a:txBody>
@@ -4979,7 +4979,7 @@
                           <a:latin typeface="Times New Roman"/>
                           <a:ea typeface="Times New Roman"/>
                         </a:rPr>
-                        <a:t>✓</a:t>
+                        <a:t>✓ 初始化　✓ 单步执行（可选中异常步重做）</a:t>
                       </a:r>
                       <a:r>
                         <a:rPr lang="en-US" sz="1150" noProof="1">
@@ -4989,7 +4989,7 @@
                           <a:latin typeface="Times New Roman"/>
                           <a:ea typeface="Times New Roman"/>
                         </a:rPr>
-                        <a:t> 初始化　</a:t>
+                        <a:t/>
                       </a:r>
                       <a:r>
                         <a:rPr lang="en-US" sz="1150" noProof="1">
@@ -4999,7 +4999,7 @@
                           <a:latin typeface="Times New Roman"/>
                           <a:ea typeface="Times New Roman"/>
                         </a:rPr>
-                        <a:t>✓</a:t>
+                        <a:t/>
                       </a:r>
                       <a:r>
                         <a:rPr lang="en-US" sz="1150" noProof="1">
@@ -5009,7 +5009,7 @@
                           <a:latin typeface="Times New Roman"/>
                           <a:ea typeface="Times New Roman"/>
                         </a:rPr>
-                        <a:t> 单步执行</a:t>
+                        <a:t/>
                       </a:r>
                     </a:p>
                   </a:txBody>
@@ -5058,7 +5058,7 @@
                           <a:latin typeface="Times New Roman"/>
                           <a:ea typeface="Times New Roman"/>
                         </a:rPr>
-                        <a:t>视觉异常弹窗</a:t>
+                        <a:t>执行中报错 / 急停弹窗</a:t>
                       </a:r>
                     </a:p>
                   </a:txBody>
@@ -5100,7 +5100,7 @@
                           <a:latin typeface="Times New Roman"/>
                           <a:ea typeface="Times New Roman"/>
                         </a:rPr>
-                        <a:t>弹窗独占 → 确认后自动停止；断点保留，处理完视觉数据后可直接续跑，无需初始化</a:t>
+                        <a:t>弹窗独占 → 确认后当前工步标记异常；排除故障后可直接再次执行重做，无需初始化</a:t>
                       </a:r>
                     </a:p>
                   </a:txBody>
@@ -5224,7 +5224,7 @@
                 <a:latin typeface="MiSans"/>
                 <a:ea typeface="MiSans"/>
               </a:rPr>
-              <a:t>✓ 可点　✗ 置灰；「停止」全局同步——任一侧停止都作用于当前执行动作，且为互锁豁免项（对方组置灰时本方停止仍可用）。</a:t>
+              <a:t>✓ 可点　✗ 置灰；v3 起无「停止」按钮——中断仅两种方式：软暂停（执行完当前工步后停住）与异常（报错/急停，弹窗确认后标记异常）。</a:t>
             </a:r>
             <a:endParaRPr lang="en-US" sz="1100" noProof="1"/>
           </a:p>
@@ -5266,7 +5266,7 @@
                 <a:latin typeface="MiSans"/>
                 <a:ea typeface="MiSans"/>
               </a:rPr>
-              <a:t>北煤机拼装产线原型 · 执行控制逻辑 v2 · 04 / 06</a:t>
+              <a:t>北煤机拼装产线原型 · 执行控制逻辑 v3 · 04 / 06</a:t>
             </a:r>
             <a:endParaRPr lang="en-US" sz="1100" noProof="1"/>
           </a:p>
@@ -5341,7 +5341,7 @@
                 <a:latin typeface="MiSans"/>
                 <a:ea typeface="MiSans"/>
               </a:rPr>
-              <a:t>单步执行：确认弹窗 → 执行 → 结束弹窗</a:t>
+              <a:t>单步执行：前序校验 → 执行 → 状态回显</a:t>
             </a:r>
             <a:endParaRPr lang="en-US" sz="2400" noProof="1"/>
           </a:p>
@@ -5495,7 +5495,7 @@
                 <a:latin typeface="MiSans"/>
                 <a:ea typeface="MiSans"/>
               </a:rPr>
-              <a:t>单步执行确认弹窗</a:t>
+              <a:t>前序工步校验</a:t>
             </a:r>
             <a:endParaRPr lang="en-US" sz="1100" noProof="1"/>
           </a:p>
@@ -5513,7 +5513,7 @@
                 <a:latin typeface="MiSans"/>
                 <a:ea typeface="MiSans"/>
               </a:rPr>
-              <a:t>回显工位、工步名称</a:t>
+              <a:t>仅人工跳选且前序存在未执行/异常时弹窗</a:t>
             </a:r>
             <a:endParaRPr lang="en-US" sz="1100" noProof="1"/>
           </a:p>
@@ -5531,7 +5531,7 @@
                 <a:latin typeface="MiSans"/>
                 <a:ea typeface="MiSans"/>
               </a:rPr>
-              <a:t>［确认执行］</a:t>
+              <a:t>［仍要执行］　［取消］</a:t>
             </a:r>
             <a:r>
               <a:rPr lang="en-US" sz="1100" noProof="1">
@@ -5541,7 +5541,7 @@
                 <a:latin typeface="MiSans"/>
                 <a:ea typeface="MiSans"/>
               </a:rPr>
-              <a:t>　［取消］</a:t>
+              <a:t/>
             </a:r>
             <a:endParaRPr lang="en-US" sz="1100" noProof="1"/>
           </a:p>
@@ -5709,7 +5709,7 @@
                 <a:latin typeface="MiSans"/>
                 <a:ea typeface="MiSans"/>
               </a:rPr>
-              <a:t>断点 → 下一工步</a:t>
+              <a:t>进度 → 下一工步</a:t>
             </a:r>
             <a:endParaRPr lang="en-US" sz="1200" noProof="1"/>
           </a:p>
@@ -5775,7 +5775,7 @@
                 <a:latin typeface="MiSans"/>
                 <a:ea typeface="MiSans"/>
               </a:rPr>
-              <a:t>单步执行结束弹窗</a:t>
+              <a:t>工步状态回显</a:t>
             </a:r>
             <a:endParaRPr lang="en-US" sz="1100" noProof="1"/>
           </a:p>
@@ -5793,7 +5793,7 @@
                 <a:latin typeface="MiSans"/>
                 <a:ea typeface="MiSans"/>
               </a:rPr>
-              <a:t>已完成「××工步」；下一工步「××」</a:t>
+              <a:t>该工步显示完成，进度推进到下一工步</a:t>
             </a:r>
             <a:endParaRPr lang="en-US" sz="1100" noProof="1"/>
           </a:p>
@@ -5811,7 +5811,7 @@
                 <a:latin typeface="MiSans"/>
                 <a:ea typeface="MiSans"/>
               </a:rPr>
-              <a:t>［继续执行下一工步］</a:t>
+              <a:t>无结束弹窗</a:t>
             </a:r>
             <a:r>
               <a:rPr lang="en-US" sz="1100" noProof="1">
@@ -5821,7 +5821,7 @@
                 <a:latin typeface="MiSans"/>
                 <a:ea typeface="MiSans"/>
               </a:rPr>
-              <a:t>　［关闭］</a:t>
+              <a:t/>
             </a:r>
             <a:endParaRPr lang="en-US" sz="1100" noProof="1"/>
           </a:p>
@@ -5991,7 +5991,7 @@
                 <a:latin typeface="MiSans"/>
                 <a:ea typeface="MiSans"/>
               </a:rPr>
-              <a:t>确认执行</a:t>
+              <a:t>前序非完成：弹窗确认</a:t>
             </a:r>
             <a:endParaRPr lang="en-US" sz="1000" noProof="1"/>
           </a:p>
@@ -6126,7 +6126,7 @@
                 <a:latin typeface="MiSans"/>
                 <a:ea typeface="MiSans"/>
               </a:rPr>
-              <a:t>取消：不建立会话、不推进断点</a:t>
+              <a:t>取消：不执行该工步</a:t>
             </a:r>
             <a:endParaRPr lang="en-US" sz="1000" noProof="1"/>
           </a:p>
@@ -6210,7 +6210,7 @@
                 <a:latin typeface="MiSans"/>
                 <a:ea typeface="MiSans"/>
               </a:rPr>
-              <a:t>「继续执行下一工步」</a:t>
+              <a:t>顺序执行下一工步</a:t>
             </a:r>
             <a:endParaRPr lang="en-US" sz="1000" noProof="1"/>
           </a:p>
@@ -6228,7 +6228,7 @@
                 <a:latin typeface="MiSans"/>
                 <a:ea typeface="MiSans"/>
               </a:rPr>
-              <a:t>直接执行，不再弹确认</a:t>
+              <a:t>点击「单步执行」直接执行</a:t>
             </a:r>
             <a:endParaRPr lang="en-US" sz="1000" noProof="1"/>
           </a:p>
@@ -6270,7 +6270,7 @@
                 <a:latin typeface="MiSans"/>
                 <a:ea typeface="MiSans"/>
               </a:rPr>
-              <a:t>① 自动执行会话中，单步 tab 仅可查看，工步列表禁选；</a:t>
+              <a:t>① 自动执行会话中，单步 tab 仅可查看，工步列表禁选；顺序单步不再弹确认/结束弹窗；</a:t>
             </a:r>
             <a:endParaRPr lang="en-US" sz="1200" noProof="1"/>
           </a:p>
@@ -6306,7 +6306,7 @@
                 <a:latin typeface="MiSans"/>
                 <a:ea typeface="MiSans"/>
               </a:rPr>
-              <a:t>③ 单步每完成一工步即推进断点，随时可切到自动执行从断点续跑。</a:t>
+              <a:t>③ 单步每完成一工步即推进进度，随时可切到自动执行续跑。</a:t>
             </a:r>
             <a:endParaRPr lang="en-US" sz="1200" noProof="1"/>
           </a:p>
@@ -6348,7 +6348,7 @@
                 <a:latin typeface="MiSans"/>
                 <a:ea typeface="MiSans"/>
               </a:rPr>
-              <a:t>北煤机拼装产线原型 · 执行控制逻辑 v2 · 05 / 06</a:t>
+              <a:t>北煤机拼装产线原型 · 执行控制逻辑 v3 · 05 / 06</a:t>
             </a:r>
             <a:endParaRPr lang="en-US" sz="1100" noProof="1"/>
           </a:p>
@@ -6517,7 +6517,7 @@
                 <a:latin typeface="MiSans"/>
                 <a:ea typeface="MiSans"/>
               </a:rPr>
-              <a:t>停止、暂停与异常：三条中断路径，归宿都是断点</a:t>
+              <a:t>暂停与异常：仅有的两种中断方式</a:t>
             </a:r>
             <a:endParaRPr lang="en-US" sz="2400" noProof="1"/>
           </a:p>
@@ -6581,7 +6581,7 @@
                 <a:latin typeface="MiSans"/>
                 <a:ea typeface="MiSans"/>
               </a:rPr>
-              <a:t>暂停与停止的区别</a:t>
+              <a:t>暂停与异常的区别</a:t>
             </a:r>
             <a:endParaRPr lang="en-US" sz="1400" noProof="1"/>
           </a:p>
@@ -6645,7 +6645,7 @@
                 <a:latin typeface="MiSans"/>
                 <a:ea typeface="MiSans"/>
               </a:rPr>
-              <a:t>暂停 —— 记住进度</a:t>
+              <a:t>暂停 —— 软暂停</a:t>
             </a:r>
             <a:endParaRPr lang="en-US" sz="1300" noProof="1"/>
           </a:p>
@@ -6687,7 +6687,7 @@
                 <a:latin typeface="MiSans"/>
                 <a:ea typeface="MiSans"/>
               </a:rPr>
-              <a:t>记住当前工步执行到哪里；「继续」后执行完当前工步，再推进到下一工步；会话保留，初始化仍禁点。</a:t>
+              <a:t>不打断当前工步：系统自动把当前工步执行完（状态显示完成）后停住；会话保留，初始化仍禁点，点「执行」从下一工步继续。</a:t>
             </a:r>
             <a:endParaRPr lang="en-US" sz="1300" noProof="1"/>
           </a:p>
@@ -6773,7 +6773,7 @@
                 <a:latin typeface="MiSans"/>
                 <a:ea typeface="MiSans"/>
               </a:rPr>
-              <a:t>停止 —— 忘掉进度</a:t>
+              <a:t>异常 —— 报错 / 急停</a:t>
             </a:r>
             <a:endParaRPr lang="en-US" sz="1300" noProof="1"/>
           </a:p>
@@ -6815,7 +6815,7 @@
                 <a:latin typeface="MiSans"/>
                 <a:ea typeface="MiSans"/>
               </a:rPr>
-              <a:t>当前工步已完成部分全部作废；该工步标记「执行错误」，再次执行时重做；断点保留在该工步——停止后执行按钮直接恢复可点，无需初始化。</a:t>
+              <a:t>当前工步已做部分作废；该工步标记「异常」，会话释放；排除故障后可直接再次执行重做，或选中该步单步执行——均无需初始化。</a:t>
             </a:r>
             <a:endParaRPr lang="en-US" sz="1300" noProof="1"/>
           </a:p>
@@ -6857,7 +6857,7 @@
                 <a:latin typeface="MiSans"/>
                 <a:ea typeface="MiSans"/>
               </a:rPr>
-              <a:t>「停止」全局同步：整线「停止」与单站「停止执行」等效，任一侧都停掉当前执行动作，且为互锁豁免项。</a:t>
+              <a:t>v3 起不再有「停止」按钮：暂停与异常是仅有的两种中断；异常由报错或人工急停触发，弹窗确认后标记异常。</a:t>
             </a:r>
             <a:endParaRPr lang="en-US" sz="1200" noProof="1"/>
           </a:p>
@@ -6899,7 +6899,7 @@
                 <a:latin typeface="MiSans"/>
                 <a:ea typeface="MiSans"/>
               </a:rPr>
-              <a:t>视觉异常处理流程</a:t>
+              <a:t>异常处理流程</a:t>
             </a:r>
             <a:endParaRPr lang="en-US" sz="1400" noProof="1"/>
           </a:p>
@@ -6965,7 +6965,7 @@
                 <a:latin typeface="MiSans"/>
                 <a:ea typeface="MiSans"/>
               </a:rPr>
-              <a:t>执行中检测到视觉异常</a:t>
+              <a:t>执行中检测到报错 / 人工急停</a:t>
             </a:r>
             <a:endParaRPr lang="en-US" sz="1200" noProof="1"/>
           </a:p>
@@ -7059,7 +7059,7 @@
                 <a:latin typeface="MiSans"/>
                 <a:ea typeface="MiSans"/>
               </a:rPr>
-              <a:t>回显工位、工件、异常工序；无取消按钮</a:t>
+              <a:t>回显工位、工件、异常工序与原因；无取消按钮</a:t>
             </a:r>
             <a:endParaRPr lang="en-US" sz="1100" noProof="1"/>
           </a:p>
@@ -7125,7 +7125,7 @@
                 <a:latin typeface="MiSans"/>
                 <a:ea typeface="MiSans"/>
               </a:rPr>
-              <a:t>确认并自动停止（等同「停止」）</a:t>
+              <a:t>确认 → 当前工步标记异常</a:t>
             </a:r>
             <a:endParaRPr lang="en-US" sz="1200" noProof="1"/>
           </a:p>
@@ -7191,7 +7191,7 @@
                 <a:latin typeface="MiSans"/>
                 <a:ea typeface="MiSans"/>
               </a:rPr>
-              <a:t>在视觉监控中处理异常数据</a:t>
+              <a:t>排除故障（含处理视觉异常数据）</a:t>
             </a:r>
             <a:endParaRPr lang="en-US" sz="1200" noProof="1"/>
           </a:p>
@@ -7257,7 +7257,7 @@
                 <a:latin typeface="MiSans"/>
                 <a:ea typeface="MiSans"/>
               </a:rPr>
-              <a:t>再次执行：从断点续跑，无需初始化</a:t>
+              <a:t>再次执行：从异常工步重做，无需初始化</a:t>
             </a:r>
             <a:endParaRPr lang="en-US" sz="1200" noProof="1"/>
           </a:p>
@@ -7342,7 +7342,7 @@
                 <a:latin typeface="MiSans"/>
                 <a:ea typeface="MiSans"/>
               </a:rPr>
-              <a:t>确认并自动停止</a:t>
+              <a:t>确认：标记异常</a:t>
             </a:r>
             <a:endParaRPr lang="en-US" sz="1000" noProof="1"/>
           </a:p>
@@ -7427,7 +7427,7 @@
                 <a:latin typeface="MiSans"/>
                 <a:ea typeface="MiSans"/>
               </a:rPr>
-              <a:t>断点保留 · 工步标记错误</a:t>
+              <a:t>会话释放 · 工步标记异常</a:t>
             </a:r>
             <a:endParaRPr lang="en-US" sz="1000" noProof="1"/>
           </a:p>
@@ -7512,7 +7512,7 @@
                 <a:latin typeface="MiSans"/>
                 <a:ea typeface="MiSans"/>
               </a:rPr>
-              <a:t>处理完成</a:t>
+              <a:t>故障排除</a:t>
             </a:r>
             <a:endParaRPr lang="en-US" sz="1000" noProof="1"/>
           </a:p>
@@ -7661,7 +7661,7 @@
                 <a:latin typeface="MiSans"/>
                 <a:ea typeface="MiSans"/>
               </a:rPr>
-              <a:t>北煤机拼装产线原型 · 执行控制逻辑 v2 · 06 / 06</a:t>
+              <a:t>北煤机拼装产线原型 · 执行控制逻辑 v3 · 06 / 06</a:t>
             </a:r>
             <a:endParaRPr lang="en-US" sz="1100" noProof="1"/>
           </a:p>

--- a/docs/generated/execution-control-flow/执行按钮逻辑流程图.pptx
+++ b/docs/generated/execution-control-flow/执行按钮逻辑流程图.pptx
@@ -3674,7 +3674,7 @@
                           <a:latin typeface="Times New Roman"/>
                           <a:ea typeface="Times New Roman"/>
                         </a:rPr>
-                        <a:t>✓</a:t>
+                        <a:t>✓ 单步执行</a:t>
                       </a:r>
                       <a:r>
                         <a:rPr lang="en-US" sz="1150" noProof="1">
@@ -3684,7 +3684,7 @@
                           <a:latin typeface="Times New Roman"/>
                           <a:ea typeface="Times New Roman"/>
                         </a:rPr>
-                        <a:t> 初始化　</a:t>
+                        <a:t/>
                       </a:r>
                       <a:r>
                         <a:rPr lang="en-US" sz="1150" noProof="1">
@@ -3694,7 +3694,7 @@
                           <a:latin typeface="Times New Roman"/>
                           <a:ea typeface="Times New Roman"/>
                         </a:rPr>
-                        <a:t>✓</a:t>
+                        <a:t/>
                       </a:r>
                       <a:r>
                         <a:rPr lang="en-US" sz="1150" noProof="1">
@@ -3704,7 +3704,7 @@
                           <a:latin typeface="Times New Roman"/>
                           <a:ea typeface="Times New Roman"/>
                         </a:rPr>
-                        <a:t> 单步执行</a:t>
+                        <a:t/>
                       </a:r>
                     </a:p>
                   </a:txBody>
@@ -4409,7 +4409,7 @@
                           <a:latin typeface="Times New Roman"/>
                           <a:ea typeface="Times New Roman"/>
                         </a:rPr>
-                        <a:t>✓ 暂停　初始化✗</a:t>
+                        <a:t>单步执行✗（执行中）</a:t>
                       </a:r>
                       <a:r>
                         <a:rPr lang="en-US" sz="1150" noProof="1">
@@ -4704,7 +4704,7 @@
                           <a:latin typeface="Times New Roman"/>
                           <a:ea typeface="Times New Roman"/>
                         </a:rPr>
-                        <a:t>✓ 执行（恢复）　初始化✗</a:t>
+                        <a:t>仅查看：单步执行✗</a:t>
                       </a:r>
                       <a:r>
                         <a:rPr lang="en-US" sz="1150" noProof="1">
@@ -4979,7 +4979,7 @@
                           <a:latin typeface="Times New Roman"/>
                           <a:ea typeface="Times New Roman"/>
                         </a:rPr>
-                        <a:t>✓ 初始化　✓ 单步执行（可选中异常步重做）</a:t>
+                        <a:t>✓ 单步执行（可选中异常步重做）</a:t>
                       </a:r>
                       <a:r>
                         <a:rPr lang="en-US" sz="1150" noProof="1">
@@ -6270,7 +6270,7 @@
                 <a:latin typeface="MiSans"/>
                 <a:ea typeface="MiSans"/>
               </a:rPr>
-              <a:t>① 自动执行会话中，单步 tab 仅可查看，工步列表禁选；顺序单步不再弹确认/结束弹窗；</a:t>
+              <a:t>① 单步 tab 仅保留「单步执行」一个按钮（无初始化/暂停），执行状态由工步状态回显；</a:t>
             </a:r>
             <a:endParaRPr lang="en-US" sz="1200" noProof="1"/>
           </a:p>

--- a/docs/generated/execution-control-flow/执行按钮逻辑流程图.pptx
+++ b/docs/generated/execution-control-flow/执行按钮逻辑流程图.pptx
@@ -1778,7 +1778,7 @@
                 <a:latin typeface="MiSans"/>
                 <a:ea typeface="MiSans"/>
               </a:rPr>
-              <a:t>北煤机拼装产线原型 · 执行控制逻辑 v3 · 02 / 06</a:t>
+              <a:t>北煤机拼装产线原型 · 执行控制逻辑 v3.1 · 02 / 06</a:t>
             </a:r>
             <a:endParaRPr lang="en-US" sz="1100" noProof="1"/>
           </a:p>
@@ -3099,7 +3099,7 @@
                 <a:latin typeface="MiSans"/>
                 <a:ea typeface="MiSans"/>
               </a:rPr>
-              <a:t>互锁摘要：运行中 → 初始化禁点、非本会话执行按钮禁点；暂停仍视为运行中，初始化同样禁点；异常确认后当前工步标记异常、会话释放，可直接再次执行重做，无需初始化。</a:t>
+              <a:t>互锁摘要：运行中 → 初始化禁点、非本会话执行按钮禁点；暂停仍视为运行中，初始化同样禁点，仅「执行（恢复）」与「停止」可点；停止（仅顶栏、互锁豁免）= 跳出执行状态，暂停态直接跳出、运行态先执行完当前工步再跳出，跳出后进入「已中断」态、进度保留可直接续跑；异常确认后当前工步标记异常、会话释放，可直接再次执行重做，无需初始化。</a:t>
             </a:r>
             <a:endParaRPr lang="en-US" sz="1200" noProof="1"/>
           </a:p>
@@ -3141,7 +3141,7 @@
                 <a:latin typeface="MiSans"/>
                 <a:ea typeface="MiSans"/>
               </a:rPr>
-              <a:t>北煤机拼装产线原型 · 执行控制逻辑 v3 · 03 / 06</a:t>
+              <a:t>北煤机拼装产线原型 · 执行控制逻辑 v3.1 · 03 / 06</a:t>
             </a:r>
             <a:endParaRPr lang="en-US" sz="1100" noProof="1"/>
           </a:p>
@@ -3795,7 +3795,7 @@
                           <a:latin typeface="Times New Roman"/>
                           <a:ea typeface="Times New Roman"/>
                         </a:rPr>
-                        <a:t>✓ 暂停　其余✗</a:t>
+                        <a:t>✓ 暂停　✓ 停止　其余✗</a:t>
                       </a:r>
                       <a:r>
                         <a:rPr lang="en-US" sz="1150" noProof="1">
@@ -4050,7 +4050,7 @@
                           <a:latin typeface="Times New Roman"/>
                           <a:ea typeface="Times New Roman"/>
                         </a:rPr>
-                        <a:t>全部置灰</a:t>
+                        <a:t>仅停止✓（跳出执行状态）</a:t>
                       </a:r>
                       <a:r>
                         <a:rPr lang="en-US" sz="1150" noProof="1">
@@ -4295,7 +4295,7 @@
                           <a:latin typeface="Times New Roman"/>
                           <a:ea typeface="Times New Roman"/>
                         </a:rPr>
-                        <a:t>全部置灰</a:t>
+                        <a:t>仅停止✓（跳出执行状态）</a:t>
                       </a:r>
                       <a:r>
                         <a:rPr lang="en-US" sz="1150" noProof="1">
@@ -4540,7 +4540,7 @@
                           <a:latin typeface="Times New Roman"/>
                           <a:ea typeface="Times New Roman"/>
                         </a:rPr>
-                        <a:t>✓ 执行（恢复）　初始化✗</a:t>
+                        <a:t>✓ 执行（恢复）　✓ 停止　初始化✗</a:t>
                       </a:r>
                       <a:r>
                         <a:rPr lang="en-US" sz="1150" noProof="1">
@@ -5224,7 +5224,7 @@
                 <a:latin typeface="MiSans"/>
                 <a:ea typeface="MiSans"/>
               </a:rPr>
-              <a:t>✓ 可点　✗ 置灰；v3 起无「停止」按钮——中断仅两种方式：软暂停（执行完当前工步后停住）与异常（报错/急停，弹窗确认后标记异常）。</a:t>
+              <a:t>✓ 可点　✗ 置灰；停止仅整线顶栏提供，互锁豁免——执行会话期间（含单站会话）可点，用于跳出执行状态：暂停态直接跳出，运行态先执行完当前工步再跳出；跳出后任务进入「已中断」态、进度保留，可直接再执行续跑。中断共三种：软暂停、停止（跳出）、异常（报错/急停，弹窗确认后标记异常）。</a:t>
             </a:r>
             <a:endParaRPr lang="en-US" sz="1100" noProof="1"/>
           </a:p>
@@ -5266,7 +5266,7 @@
                 <a:latin typeface="MiSans"/>
                 <a:ea typeface="MiSans"/>
               </a:rPr>
-              <a:t>北煤机拼装产线原型 · 执行控制逻辑 v3 · 04 / 06</a:t>
+              <a:t>北煤机拼装产线原型 · 执行控制逻辑 v3.1 · 04 / 06</a:t>
             </a:r>
             <a:endParaRPr lang="en-US" sz="1100" noProof="1"/>
           </a:p>
@@ -6348,7 +6348,7 @@
                 <a:latin typeface="MiSans"/>
                 <a:ea typeface="MiSans"/>
               </a:rPr>
-              <a:t>北煤机拼装产线原型 · 执行控制逻辑 v3 · 05 / 06</a:t>
+              <a:t>北煤机拼装产线原型 · 执行控制逻辑 v3.1 · 05 / 06</a:t>
             </a:r>
             <a:endParaRPr lang="en-US" sz="1100" noProof="1"/>
           </a:p>
@@ -7661,7 +7661,7 @@
                 <a:latin typeface="MiSans"/>
                 <a:ea typeface="MiSans"/>
               </a:rPr>
-              <a:t>北煤机拼装产线原型 · 执行控制逻辑 v3 · 06 / 06</a:t>
+              <a:t>北煤机拼装产线原型 · 执行控制逻辑 v3.1 · 06 / 06</a:t>
             </a:r>
             <a:endParaRPr lang="en-US" sz="1100" noProof="1"/>
           </a:p>

--- a/docs/generated/execution-control-flow/执行按钮逻辑流程图.pptx
+++ b/docs/generated/execution-control-flow/执行按钮逻辑流程图.pptx
@@ -3530,7 +3530,7 @@
                           <a:latin typeface="Times New Roman"/>
                           <a:ea typeface="Times New Roman"/>
                         </a:rPr>
-                        <a:t>✓</a:t>
+                        <a:t>✓ 初始化　✓ 执行　停止✗（空闲置灰）</a:t>
                       </a:r>
                       <a:r>
                         <a:rPr lang="en-US" sz="1150" noProof="1">
@@ -3540,7 +3540,7 @@
                           <a:latin typeface="Times New Roman"/>
                           <a:ea typeface="Times New Roman"/>
                         </a:rPr>
-                        <a:t> 初始化　</a:t>
+                        <a:t/>
                       </a:r>
                       <a:r>
                         <a:rPr lang="en-US" sz="1150" noProof="1">
@@ -3550,7 +3550,7 @@
                           <a:latin typeface="Times New Roman"/>
                           <a:ea typeface="Times New Roman"/>
                         </a:rPr>
-                        <a:t>✓</a:t>
+                        <a:t/>
                       </a:r>
                       <a:r>
                         <a:rPr lang="en-US" sz="1150" noProof="1">
@@ -3560,7 +3560,7 @@
                           <a:latin typeface="Times New Roman"/>
                           <a:ea typeface="Times New Roman"/>
                         </a:rPr>
-                        <a:t> 执行</a:t>
+                        <a:t/>
                       </a:r>
                     </a:p>
                   </a:txBody>
@@ -4835,7 +4835,7 @@
                           <a:latin typeface="Times New Roman"/>
                           <a:ea typeface="Times New Roman"/>
                         </a:rPr>
-                        <a:t>✓ 初始化　✓ 执行（从异常工步重做）</a:t>
+                        <a:t>✓ 初始化　✓ 执行（从异常工步重做）　停止✗（会话已释放）</a:t>
                       </a:r>
                       <a:r>
                         <a:rPr lang="en-US" sz="1150" noProof="1">

--- a/docs/generated/execution-control-flow/执行按钮逻辑流程图.pptx
+++ b/docs/generated/execution-control-flow/执行按钮逻辑流程图.pptx
@@ -345,7 +345,7 @@
                 <a:latin typeface="MiSans"/>
                 <a:ea typeface="MiSans"/>
               </a:rPr>
-              <a:t>执行/暂停两态 · 异常标记 · 跳选前序校验 —— 执行按钮逻辑设计（v3 定稿）</a:t>
+              <a:t>执行/暂停两态 · 异常标记 · 跳选前序校验 · 过程演示动画 —— 执行按钮逻辑设计（v3.2 定稿）</a:t>
             </a:r>
             <a:endParaRPr lang="en-US" sz="1600" noProof="1"/>
           </a:p>
@@ -387,7 +387,7 @@
                 <a:latin typeface="MiSans"/>
                 <a:ea typeface="MiSans"/>
               </a:rPr>
-              <a:t>2026-10-28 ｜ 配套文档：docs/product-specs/production-execution-control.md</a:t>
+              <a:t>2026-10-28 定稿 · 2026-10-29 增补过程演示动画 ｜ 配套文档：docs/product-specs/production-execution-control.md</a:t>
             </a:r>
             <a:endParaRPr lang="en-US" sz="1200" noProof="1"/>
           </a:p>
@@ -1630,7 +1630,7 @@
                 <a:latin typeface="MiSans"/>
                 <a:ea typeface="MiSans"/>
               </a:rPr>
-              <a:t>软暂停：系统把当前工步执行完后停住；仍视为运行中，初始化禁点，仅「执行（恢复）」可点。</a:t>
+              <a:t>软暂停：系统把当前工步执行完后停住；仍视为运行中，初始化禁点，仅「执行（恢复）」可点。演示动画中暂停按钮先显示「等待完成」禁点。</a:t>
             </a:r>
             <a:endParaRPr lang="en-US" sz="1200" noProof="1"/>
           </a:p>
@@ -1778,7 +1778,7 @@
                 <a:latin typeface="MiSans"/>
                 <a:ea typeface="MiSans"/>
               </a:rPr>
-              <a:t>北煤机拼装产线原型 · 执行控制逻辑 v3.1 · 02 / 06</a:t>
+              <a:t>北煤机拼装产线原型 · 执行控制逻辑 v3.2 · 02 / 06</a:t>
             </a:r>
             <a:endParaRPr lang="en-US" sz="1100" noProof="1"/>
           </a:p>
@@ -3099,7 +3099,7 @@
                 <a:latin typeface="MiSans"/>
                 <a:ea typeface="MiSans"/>
               </a:rPr>
-              <a:t>互锁摘要：运行中 → 初始化禁点、非本会话执行按钮禁点；暂停仍视为运行中，初始化同样禁点，仅「执行（恢复）」与「停止」可点；停止（仅顶栏、互锁豁免）= 跳出执行状态，暂停态直接跳出、运行态先执行完当前工步再跳出，跳出后进入「已中断」态、进度保留可直接续跑；异常确认后当前工步标记异常、会话释放，可直接再次执行重做，无需初始化。</a:t>
+              <a:t>互锁摘要：运行中 → 初始化禁点、非本会话执行按钮禁点；暂停仍视为运行中，初始化同样禁点，仅「执行（恢复）」与「停止」可点；停止（仅顶栏、互锁豁免）= 跳出执行状态，暂停态直接跳出、运行态先执行完当前工步再跳出，跳出后进入「已中断」态、进度保留可直接续跑；异常确认后当前工步标记异常、会话释放，可直接再次执行重做，无需初始化；演示动画：动画工位工步 3s 完成，整线全新启动先等 5s 托盘就位，上贴板1-1装配·粗定位中途（1.5s）注入视觉异常。</a:t>
             </a:r>
             <a:endParaRPr lang="en-US" sz="1200" noProof="1"/>
           </a:p>
@@ -3141,7 +3141,7 @@
                 <a:latin typeface="MiSans"/>
                 <a:ea typeface="MiSans"/>
               </a:rPr>
-              <a:t>北煤机拼装产线原型 · 执行控制逻辑 v3.1 · 03 / 06</a:t>
+              <a:t>北煤机拼装产线原型 · 执行控制逻辑 v3.2 · 03 / 06</a:t>
             </a:r>
             <a:endParaRPr lang="en-US" sz="1100" noProof="1"/>
           </a:p>
@@ -3795,7 +3795,7 @@
                           <a:latin typeface="Times New Roman"/>
                           <a:ea typeface="Times New Roman"/>
                         </a:rPr>
-                        <a:t>✓ 暂停　✓ 停止　其余✗</a:t>
+                        <a:t>✓ 暂停（动画中先「等待完成」）　✓ 停止　其余✗</a:t>
                       </a:r>
                       <a:r>
                         <a:rPr lang="en-US" sz="1150" noProof="1">
@@ -5266,7 +5266,7 @@
                 <a:latin typeface="MiSans"/>
                 <a:ea typeface="MiSans"/>
               </a:rPr>
-              <a:t>北煤机拼装产线原型 · 执行控制逻辑 v3.1 · 04 / 06</a:t>
+              <a:t>北煤机拼装产线原型 · 执行控制逻辑 v3.2 · 04 / 06</a:t>
             </a:r>
             <a:endParaRPr lang="en-US" sz="1100" noProof="1"/>
           </a:p>
@@ -6348,7 +6348,7 @@
                 <a:latin typeface="MiSans"/>
                 <a:ea typeface="MiSans"/>
               </a:rPr>
-              <a:t>北煤机拼装产线原型 · 执行控制逻辑 v3.1 · 05 / 06</a:t>
+              <a:t>北煤机拼装产线原型 · 执行控制逻辑 v3.2 · 05 / 06</a:t>
             </a:r>
             <a:endParaRPr lang="en-US" sz="1100" noProof="1"/>
           </a:p>
@@ -6517,7 +6517,7 @@
                 <a:latin typeface="MiSans"/>
                 <a:ea typeface="MiSans"/>
               </a:rPr>
-              <a:t>暂停与异常：仅有的两种中断方式</a:t>
+              <a:t>中断与演示动画：软暂停 · 停止跳出 · 异常</a:t>
             </a:r>
             <a:endParaRPr lang="en-US" sz="2400" noProof="1"/>
           </a:p>
@@ -6687,7 +6687,7 @@
                 <a:latin typeface="MiSans"/>
                 <a:ea typeface="MiSans"/>
               </a:rPr>
-              <a:t>不打断当前工步：系统自动把当前工步执行完（状态显示完成）后停住；会话保留，初始化仍禁点，点「执行」从下一工步继续。</a:t>
+              <a:t>不打断当前工步：系统自动把当前工步执行完（状态显示完成）后停住；会话保留，初始化仍禁点，点「执行」从下一工步继续。演示动画中点击暂停后按钮先变为「等待完成」禁点，待当前工步执行完才真正停住。</a:t>
             </a:r>
             <a:endParaRPr lang="en-US" sz="1300" noProof="1"/>
           </a:p>
@@ -6857,7 +6857,7 @@
                 <a:latin typeface="MiSans"/>
                 <a:ea typeface="MiSans"/>
               </a:rPr>
-              <a:t>v3 起不再有「停止」按钮：暂停与异常是仅有的两种中断；异常由报错或人工急停触发，弹窗确认后标记异常。</a:t>
+              <a:t>中断共三种：软暂停（执行完当前工步后停住）、停止（仅整线顶栏、互锁豁免，暂停态直接跳出 / 运行态先执行完当前工步再跳出）、异常（报错 / 人工急停，弹窗确认后标记异常）。 v3.2 过程演示动画：动画工位工步 3s 完成；整线全新启动先等 5s 托盘就位（默认上料完成）；上贴板1-1装配·粗定位执行至中途（1.5s）注入视觉异常，演示异常中断全流程。</a:t>
             </a:r>
             <a:endParaRPr lang="en-US" sz="1200" noProof="1"/>
           </a:p>
@@ -7661,7 +7661,7 @@
                 <a:latin typeface="MiSans"/>
                 <a:ea typeface="MiSans"/>
               </a:rPr>
-              <a:t>北煤机拼装产线原型 · 执行控制逻辑 v3.1 · 06 / 06</a:t>
+              <a:t>北煤机拼装产线原型 · 执行控制逻辑 v3.2 · 06 / 06</a:t>
             </a:r>
             <a:endParaRPr lang="en-US" sz="1100" noProof="1"/>
           </a:p>
